--- a/docs/articles/assets/pptx/gallery_line_03.pptx
+++ b/docs/articles/assets/pptx/gallery_line_03.pptx
@@ -110,7 +110,7 @@
 </p:presentation>
 </file>
 
-<file path=ppt/charts/chart1845443ca6f6.xml><?xml version="1.0" encoding="utf-8"?>
+<file path=ppt/charts/chart170b4723094d9.xml><?xml version="1.0" encoding="utf-8"?>
 <c:chartSpace xmlns:c="http://schemas.openxmlformats.org/drawingml/2006/chart" xmlns:a="http://schemas.openxmlformats.org/drawingml/2006/main" xmlns:r="http://schemas.openxmlformats.org/officeDocument/2006/relationships">
   <c:date1904 val="0"/>
   <c:lang val="fr-FR"/>
@@ -124,7 +124,7 @@
     </mc:Fallback>
   </mc:AlternateContent>
   <c:chart>
-    <c:autoTitleDeleted val="0"/>
+    <c:autoTitleDeleted val="1"/>
     <c:plotArea xmlns:c="http://schemas.openxmlformats.org/drawingml/2006/chart" xmlns:a="http://schemas.openxmlformats.org/drawingml/2006/main" xmlns:r="http://schemas.openxmlformats.org/officeDocument/2006/relationships">
       <c:layout/>
       <c:lineChart>
@@ -150,12 +150,13 @@
                 <a:alpha val="100000"/>
               </a:srgbClr>
             </a:solidFill>
-            <a:ln>
+            <a:ln algn="ctr" w="25400">
               <a:solidFill>
                 <a:srgbClr val="332288">
                   <a:alpha val="100000"/>
                 </a:srgbClr>
               </a:solidFill>
+              <a:prstDash val="solid"/>
             </a:ln>
           </c:spPr>
           <c:marker>
@@ -174,6 +175,7 @@
                   </a:srgbClr>
                 </a:solidFill>
               </a:ln>
+              <a:effectLst/>
             </c:spPr>
           </c:marker>
           <c:dLbls>
@@ -183,7 +185,7 @@
               <a:lstStyle/>
               <a:p>
                 <a:pPr>
-                  <a:defRPr>
+                  <a:defRPr cap="none">
                     <a:solidFill>
                       <a:srgbClr val="000000">
                         <a:alpha val="100000"/>
@@ -256,6 +258,7 @@
               </c:numCache>
             </c:numRef>
           </c:val>
+          <c:smooth val="1"/>
         </c:ser>
         <c:ser>
           <c:idx val="1"/>
@@ -277,12 +280,13 @@
                 <a:alpha val="100000"/>
               </a:srgbClr>
             </a:solidFill>
-            <a:ln>
+            <a:ln algn="ctr" w="25400">
               <a:solidFill>
                 <a:srgbClr val="88CCEE">
                   <a:alpha val="100000"/>
                 </a:srgbClr>
               </a:solidFill>
+              <a:prstDash val="solid"/>
             </a:ln>
           </c:spPr>
           <c:marker>
@@ -301,6 +305,7 @@
                   </a:srgbClr>
                 </a:solidFill>
               </a:ln>
+              <a:effectLst/>
             </c:spPr>
           </c:marker>
           <c:dLbls>
@@ -310,7 +315,7 @@
               <a:lstStyle/>
               <a:p>
                 <a:pPr>
-                  <a:defRPr>
+                  <a:defRPr cap="none">
                     <a:solidFill>
                       <a:srgbClr val="000000">
                         <a:alpha val="100000"/>
@@ -383,6 +388,7 @@
               </c:numCache>
             </c:numRef>
           </c:val>
+          <c:smooth val="1"/>
         </c:ser>
         <c:ser>
           <c:idx val="2"/>
@@ -404,12 +410,13 @@
                 <a:alpha val="100000"/>
               </a:srgbClr>
             </a:solidFill>
-            <a:ln>
+            <a:ln algn="ctr" w="25400">
               <a:solidFill>
                 <a:srgbClr val="117733">
                   <a:alpha val="100000"/>
                 </a:srgbClr>
               </a:solidFill>
+              <a:prstDash val="solid"/>
             </a:ln>
           </c:spPr>
           <c:marker>
@@ -428,6 +435,7 @@
                   </a:srgbClr>
                 </a:solidFill>
               </a:ln>
+              <a:effectLst/>
             </c:spPr>
           </c:marker>
           <c:dLbls>
@@ -437,7 +445,7 @@
               <a:lstStyle/>
               <a:p>
                 <a:pPr>
-                  <a:defRPr>
+                  <a:defRPr cap="none">
                     <a:solidFill>
                       <a:srgbClr val="000000">
                         <a:alpha val="100000"/>
@@ -510,6 +518,7 @@
               </c:numCache>
             </c:numRef>
           </c:val>
+          <c:smooth val="1"/>
         </c:ser>
         <c:ser>
           <c:idx val="3"/>
@@ -531,12 +540,13 @@
                 <a:alpha val="100000"/>
               </a:srgbClr>
             </a:solidFill>
-            <a:ln>
+            <a:ln algn="ctr" w="25400">
               <a:solidFill>
                 <a:srgbClr val="DDCC77">
                   <a:alpha val="100000"/>
                 </a:srgbClr>
               </a:solidFill>
+              <a:prstDash val="solid"/>
             </a:ln>
           </c:spPr>
           <c:marker>
@@ -555,6 +565,7 @@
                   </a:srgbClr>
                 </a:solidFill>
               </a:ln>
+              <a:effectLst/>
             </c:spPr>
           </c:marker>
           <c:dLbls>
@@ -564,7 +575,7 @@
               <a:lstStyle/>
               <a:p>
                 <a:pPr>
-                  <a:defRPr>
+                  <a:defRPr cap="none">
                     <a:solidFill>
                       <a:srgbClr val="000000">
                         <a:alpha val="100000"/>
@@ -637,6 +648,7 @@
               </c:numCache>
             </c:numRef>
           </c:val>
+          <c:smooth val="1"/>
         </c:ser>
         <c:ser>
           <c:idx val="4"/>
@@ -658,12 +670,13 @@
                 <a:alpha val="100000"/>
               </a:srgbClr>
             </a:solidFill>
-            <a:ln>
+            <a:ln algn="ctr" w="25400">
               <a:solidFill>
                 <a:srgbClr val="CC6677">
                   <a:alpha val="100000"/>
                 </a:srgbClr>
               </a:solidFill>
+              <a:prstDash val="solid"/>
             </a:ln>
           </c:spPr>
           <c:marker>
@@ -682,6 +695,7 @@
                   </a:srgbClr>
                 </a:solidFill>
               </a:ln>
+              <a:effectLst/>
             </c:spPr>
           </c:marker>
           <c:dLbls>
@@ -691,7 +705,7 @@
               <a:lstStyle/>
               <a:p>
                 <a:pPr>
-                  <a:defRPr>
+                  <a:defRPr cap="none">
                     <a:solidFill>
                       <a:srgbClr val="000000">
                         <a:alpha val="100000"/>
@@ -764,6 +778,7 @@
               </c:numCache>
             </c:numRef>
           </c:val>
+          <c:smooth val="1"/>
         </c:ser>
         <c:ser>
           <c:idx val="5"/>
@@ -785,12 +800,13 @@
                 <a:alpha val="100000"/>
               </a:srgbClr>
             </a:solidFill>
-            <a:ln>
+            <a:ln algn="ctr" w="25400">
               <a:solidFill>
                 <a:srgbClr val="AA4499">
                   <a:alpha val="100000"/>
                 </a:srgbClr>
               </a:solidFill>
+              <a:prstDash val="solid"/>
             </a:ln>
           </c:spPr>
           <c:marker>
@@ -809,6 +825,7 @@
                   </a:srgbClr>
                 </a:solidFill>
               </a:ln>
+              <a:effectLst/>
             </c:spPr>
           </c:marker>
           <c:dLbls>
@@ -818,7 +835,7 @@
               <a:lstStyle/>
               <a:p>
                 <a:pPr>
-                  <a:defRPr>
+                  <a:defRPr cap="none">
                     <a:solidFill>
                       <a:srgbClr val="000000">
                         <a:alpha val="100000"/>
@@ -891,6 +908,7 @@
               </c:numCache>
             </c:numRef>
           </c:val>
+          <c:smooth val="1"/>
         </c:ser>
         <c:dLbls>
           <c:numFmt formatCode="General" sourceLinked="0"/>
@@ -935,7 +953,7 @@
                   <a:defRPr/>
                 </a:pPr>
                 <a:r>
-                  <a:rPr sz="1600" b="1">
+                  <a:rPr cap="none" sz="1600" b="1">
                     <a:solidFill>
                       <a:srgbClr val="000000">
                         <a:alpha val="100000"/>
@@ -960,7 +978,7 @@
           <a:lstStyle/>
           <a:p>
             <a:pPr>
-              <a:defRPr sz="1000">
+              <a:defRPr cap="none" sz="1000">
                 <a:solidFill>
                   <a:srgbClr val="000000">
                     <a:alpha val="100000"/>
@@ -1015,7 +1033,7 @@
                   <a:defRPr/>
                 </a:pPr>
                 <a:r>
-                  <a:rPr sz="1600" b="1">
+                  <a:rPr cap="none" sz="1600" b="1">
                     <a:solidFill>
                       <a:srgbClr val="000000">
                         <a:alpha val="100000"/>
@@ -1040,7 +1058,7 @@
           <a:lstStyle/>
           <a:p>
             <a:pPr>
-              <a:defRPr sz="1000">
+              <a:defRPr cap="none" sz="1000">
                 <a:solidFill>
                   <a:srgbClr val="000000">
                     <a:alpha val="100000"/>
@@ -1076,7 +1094,7 @@
         <a:lstStyle/>
         <a:p>
           <a:pPr>
-            <a:defRPr sz="1400">
+            <a:defRPr cap="none" sz="1400">
               <a:solidFill>
                 <a:srgbClr val="000000">
                   <a:alpha val="100000"/>
